--- a/assets/pptx/catalog-480.pptx
+++ b/assets/pptx/catalog-480.pptx
@@ -3339,7 +3339,7 @@
                 <a:ea typeface="Ebrima"/>
                 <a:cs typeface="Ebrima"/>
               </a:rPr>
-              <a:t>እግዚአብሔር ላይ በማደሪያው ላይ (3x)</a:t>
+              <a:t>እግዚአብሔር ላይ በማደሪያው ላይ 3x</a:t>
             </a:r>
           </a:p>
         </p:txBody>
@@ -3406,7 +3406,7 @@
                 <a:ea typeface="Ebrima"/>
                 <a:cs typeface="Ebrima"/>
               </a:rPr>
-              <a:t>አለ እርሱ አለ (4x)</a:t>
+              <a:t>አለ እርሱ አለ 4x</a:t>
             </a:r>
           </a:p>
           <a:p>
@@ -3491,7 +3491,7 @@
                 <a:ea typeface="Ebrima"/>
                 <a:cs typeface="Ebrima"/>
               </a:rPr>
-              <a:t>ኦ አለ ምለው (3x) (አለ ምለው አለ ምለው)</a:t>
+              <a:t>ኦ አለ ምለው 3x አለ ምለው አለ ምለው</a:t>
             </a:r>
           </a:p>
           <a:p>
@@ -3509,7 +3509,7 @@
                 <a:ea typeface="Ebrima"/>
                 <a:cs typeface="Ebrima"/>
               </a:rPr>
-              <a:t>ምዘምረው (ምዘምረው) ምናገረው ምፎክረው (ምፎክረው)</a:t>
+              <a:t>ምዘምረው ምዘምረው ምናገረው ምፎክረው ምፎክረው</a:t>
             </a:r>
           </a:p>
           <a:p>
@@ -3527,7 +3527,7 @@
                 <a:ea typeface="Ebrima"/>
                 <a:cs typeface="Ebrima"/>
               </a:rPr>
-              <a:t>ስለ እግዚአብሔር ስለ አምላኬ ስለ እርሱ ነው (2x)</a:t>
+              <a:t>ስለ እግዚአብሔር ስለ አምላኬ ስለ እርሱ ነው 2x</a:t>
             </a:r>
           </a:p>
         </p:txBody>
@@ -3594,7 +3594,7 @@
                 <a:ea typeface="Ebrima"/>
                 <a:cs typeface="Ebrima"/>
               </a:rPr>
-              <a:t>እንደ እግዚአብሔር ያለ (7x)</a:t>
+              <a:t>እንደ እግዚአብሔር ያለ 7x</a:t>
             </a:r>
           </a:p>
           <a:p>
@@ -3697,7 +3697,7 @@
                 <a:ea typeface="Ebrima"/>
                 <a:cs typeface="Ebrima"/>
               </a:rPr>
-              <a:t>እግዚአብሔር ላይ በማደሪያው ላይ (2x)</a:t>
+              <a:t>እግዚአብሔር ላይ በማደሪያው ላይ 2x</a:t>
             </a:r>
           </a:p>
         </p:txBody>
@@ -3764,7 +3764,7 @@
                 <a:ea typeface="Ebrima"/>
                 <a:cs typeface="Ebrima"/>
               </a:rPr>
-              <a:t>ኦ አለ ምለው (3x) (አለ ምለው አለ ምለው)</a:t>
+              <a:t>ኦ አለ ምለው 3x አለ ምለው አለ ምለው</a:t>
             </a:r>
           </a:p>
           <a:p>
@@ -3782,7 +3782,7 @@
                 <a:ea typeface="Ebrima"/>
                 <a:cs typeface="Ebrima"/>
               </a:rPr>
-              <a:t>ምዘምረው (ምዘምረው) ምናገረው ምፎክረው (ምፎክረው)</a:t>
+              <a:t>ምዘምረው ምዘምረው ምናገረው ምፎክረው ምፎክረው</a:t>
             </a:r>
           </a:p>
           <a:p>
@@ -3800,7 +3800,7 @@
                 <a:ea typeface="Ebrima"/>
                 <a:cs typeface="Ebrima"/>
               </a:rPr>
-              <a:t>ስለ እግዚአብሔር ስለ አምላኬ ስለ እርሱ ነው (2x)</a:t>
+              <a:t>ስለ እግዚአብሔር ስለ አምላኬ ስለ እርሱ ነው 2x</a:t>
             </a:r>
           </a:p>
         </p:txBody>
@@ -3867,7 +3867,7 @@
                 <a:ea typeface="Ebrima"/>
                 <a:cs typeface="Ebrima"/>
               </a:rPr>
-              <a:t>እንደ እግዚአብሔር ያለ (7x)</a:t>
+              <a:t>እንደ እግዚአብሔር ያለ 7x</a:t>
             </a:r>
           </a:p>
           <a:p>
@@ -3952,7 +3952,7 @@
                 <a:ea typeface="Ebrima"/>
                 <a:cs typeface="Ebrima"/>
               </a:rPr>
-              <a:t>የለም የለም የለም የለም (የለም) (7x)</a:t>
+              <a:t>የለም የለም የለም የለም የለም 7x</a:t>
             </a:r>
           </a:p>
         </p:txBody>
@@ -4019,7 +4019,7 @@
                 <a:ea typeface="Ebrima"/>
                 <a:cs typeface="Ebrima"/>
               </a:rPr>
-              <a:t>እንደ እግዚአብሔር ያለ (7x)</a:t>
+              <a:t>እንደ እግዚአብሔር ያለ 7x</a:t>
             </a:r>
           </a:p>
           <a:p>
